--- a/reference/governance/sdlc/assets/evolith-ums-case-study.pptx
+++ b/reference/governance/sdlc/assets/evolith-ums-case-study.pptx
@@ -8,15 +8,8 @@
     <p:sldId id="256" r:id="rId7"/>
     <p:sldId id="257" r:id="rId8"/>
     <p:sldId id="258" r:id="rId9"/>
-    <p:sldId id="259" r:id="rId10"/>
-    <p:sldId id="260" r:id="rId11"/>
-    <p:sldId id="261" r:id="rId12"/>
-    <p:sldId id="262" r:id="rId13"/>
-    <p:sldId id="263" r:id="rId14"/>
-    <p:sldId id="264" r:id="rId15"/>
-    <p:sldId id="265" r:id="rId16"/>
   </p:sldIdLst>
-  <p:sldSz cx="12191695" cy="6858000" type="screen4x3"/>
+  <p:sldSz cx="9144000" cy="6858000" type="screen4x3"/>
   <p:notesSz cx="6858000" cy="9144000"/>
   <p:defaultTextStyle>
     <a:defPPr>
@@ -3090,6 +3083,14 @@
 <file path=ppt/slides/slide1.xml><?xml version="1.0" encoding="utf-8"?>
 <p:sld xmlns:a="http://schemas.openxmlformats.org/drawingml/2006/main" xmlns:p="http://schemas.openxmlformats.org/presentationml/2006/main" xmlns:r="http://schemas.openxmlformats.org/officeDocument/2006/relationships">
   <p:cSld>
+    <p:bg>
+      <p:bgPr>
+        <a:solidFill>
+          <a:srgbClr val="121212"/>
+        </a:solidFill>
+        <a:effectLst/>
+      </p:bgPr>
+    </p:bg>
     <p:spTree>
       <p:nvGrpSpPr>
         <p:cNvPr id="1" name=""/>
@@ -3099,24 +3100,109 @@
       <p:grpSpPr/>
       <p:sp>
         <p:nvSpPr>
-          <p:cNvPr id="2" name="Rectangle 1"/>
-          <p:cNvSpPr/>
-          <p:nvPr/>
+          <p:cNvPr id="2" name="Title 1"/>
+          <p:cNvSpPr>
+            <a:spLocks noGrp="1"/>
+          </p:cNvSpPr>
+          <p:nvPr>
+            <p:ph type="ctrTitle"/>
+          </p:nvPr>
         </p:nvSpPr>
         <p:spPr>
           <a:xfrm>
-            <a:off x="0" y="0"/>
-            <a:ext cx="12191695" cy="6858000"/>
+            <a:off x="457200" y="457200"/>
+            <a:ext cx="8229600" cy="914400"/>
+          </a:xfrm>
+        </p:spPr>
+        <p:txBody>
+          <a:bodyPr/>
+          <a:lstStyle/>
+          <a:p>
+            <a:pPr algn="l"/>
+            <a:r>
+              <a:rPr sz="3600" b="1">
+                <a:solidFill>
+                  <a:srgbClr val="CAC5B2"/>
+                </a:solidFill>
+              </a:rPr>
+              <a:t>UMS: De la Incertidumbre a la Entrega Continua</a:t>
+            </a:r>
+          </a:p>
+        </p:txBody>
+      </p:sp>
+      <p:sp>
+        <p:nvSpPr>
+          <p:cNvPr id="3" name="Subtitle 2"/>
+          <p:cNvSpPr>
+            <a:spLocks noGrp="1"/>
+          </p:cNvSpPr>
+          <p:nvPr>
+            <p:ph type="subTitle" idx="1"/>
+          </p:nvPr>
+        </p:nvSpPr>
+        <p:spPr/>
+        <p:txBody>
+          <a:bodyPr/>
+          <a:lstStyle/>
+          <a:p/>
+        </p:txBody>
+      </p:sp>
+      <p:sp>
+        <p:nvSpPr>
+          <p:cNvPr id="4" name="TextBox 3"/>
+          <p:cNvSpPr txBox="1"/>
+          <p:nvPr/>
+        </p:nvSpPr>
+        <p:spPr>
+          <a:xfrm>
+            <a:off x="457200" y="1828800"/>
+            <a:ext cx="8229600" cy="1371600"/>
           </a:xfrm>
           <a:prstGeom prst="rect">
             <a:avLst/>
           </a:prstGeom>
+          <a:noFill/>
+        </p:spPr>
+        <p:txBody>
+          <a:bodyPr wrap="none">
+            <a:spAutoFit/>
+          </a:bodyPr>
+          <a:lstStyle/>
+          <a:p/>
+          <a:p>
+            <a:pPr>
+              <a:defRPr sz="2400">
+                <a:solidFill>
+                  <a:srgbClr val="FFFFFF"/>
+                </a:solidFill>
+              </a:defRPr>
+            </a:pPr>
+            <a:r>
+              <a:t>Caso Práctico: Portal de Autoservicio Industrial</a:t>
+            </a:r>
+          </a:p>
+        </p:txBody>
+      </p:sp>
+      <p:sp>
+        <p:nvSpPr>
+          <p:cNvPr id="5" name="Rounded Rectangle 4"/>
+          <p:cNvSpPr/>
+          <p:nvPr/>
+        </p:nvSpPr>
+        <p:spPr>
+          <a:xfrm>
+            <a:off x="3657600" y="3657600"/>
+            <a:ext cx="1828800" cy="1828800"/>
+          </a:xfrm>
+          <a:prstGeom prst="roundRect">
+            <a:avLst/>
+          </a:prstGeom>
           <a:solidFill>
-            <a:srgbClr val="1E3A5F"/>
+            <a:srgbClr val="121212"/>
           </a:solidFill>
-          <a:ln>
+          <a:ln w="25400">
             <a:solidFill>
-              <a:srgbClr val="1E3A5F"/>
+              <a:srgbClr val="CAC5B2"/>
             </a:solidFill>
           </a:ln>
         </p:spPr>
@@ -3139,29 +3225,74 @@
           <a:lstStyle/>
           <a:p>
             <a:pPr algn="ctr"/>
-          </a:p>
-        </p:txBody>
-      </p:sp>
-      <p:sp>
-        <p:nvSpPr>
-          <p:cNvPr id="3" name="Rectangle 2"/>
+            <a:r>
+              <a:rPr sz="1400" b="1">
+                <a:solidFill>
+                  <a:srgbClr val="121212"/>
+                </a:solidFill>
+              </a:rPr>
+              <a:t>EVOLITH</a:t>
+            </a:r>
+          </a:p>
+          <a:p>
+            <a:pPr algn="ctr"/>
+            <a:r>
+              <a:rPr sz="1400" b="1">
+                <a:solidFill>
+                  <a:srgbClr val="121212"/>
+                </a:solidFill>
+              </a:rPr>
+              <a:t>CORE</a:t>
+            </a:r>
+          </a:p>
+        </p:txBody>
+      </p:sp>
+    </p:spTree>
+  </p:cSld>
+  <p:clrMapOvr>
+    <a:masterClrMapping/>
+  </p:clrMapOvr>
+</p:sld>
+</file>
+
+<file path=ppt/slides/slide2.xml><?xml version="1.0" encoding="utf-8"?>
+<p:sld xmlns:a="http://schemas.openxmlformats.org/drawingml/2006/main" xmlns:p="http://schemas.openxmlformats.org/presentationml/2006/main" xmlns:r="http://schemas.openxmlformats.org/officeDocument/2006/relationships">
+  <p:cSld>
+    <p:bg>
+      <p:bgPr>
+        <a:solidFill>
+          <a:srgbClr val="121212"/>
+        </a:solidFill>
+        <a:effectLst/>
+      </p:bgPr>
+    </p:bg>
+    <p:spTree>
+      <p:nvGrpSpPr>
+        <p:cNvPr id="1" name=""/>
+        <p:cNvGrpSpPr/>
+        <p:nvPr/>
+      </p:nvGrpSpPr>
+      <p:grpSpPr/>
+      <p:sp>
+        <p:nvSpPr>
+          <p:cNvPr id="2" name="Right Arrow 1"/>
           <p:cNvSpPr/>
           <p:nvPr/>
         </p:nvSpPr>
         <p:spPr>
           <a:xfrm>
-            <a:off x="0" y="6400800"/>
-            <a:ext cx="12191695" cy="457200"/>
+            <a:off x="914400" y="3657600"/>
+            <a:ext cx="6400800" cy="182880"/>
           </a:xfrm>
-          <a:prstGeom prst="rect">
+          <a:prstGeom prst="rightArrow">
             <a:avLst/>
           </a:prstGeom>
           <a:solidFill>
-            <a:srgbClr val="3B82F6"/>
+            <a:srgbClr val="CAC5B2"/>
           </a:solidFill>
           <a:ln>
             <a:solidFill>
-              <a:srgbClr val="3B82F6"/>
+              <a:srgbClr val="CAC5B2"/>
             </a:solidFill>
           </a:ln>
         </p:spPr>
@@ -3189,92 +3320,22 @@
       </p:sp>
       <p:sp>
         <p:nvSpPr>
-          <p:cNvPr id="4" name="TextBox 3"/>
-          <p:cNvSpPr txBox="1"/>
+          <p:cNvPr id="3" name="Rounded Rectangle 2"/>
+          <p:cNvSpPr/>
           <p:nvPr/>
         </p:nvSpPr>
         <p:spPr>
           <a:xfrm>
-            <a:off x="914400" y="2286000"/>
-            <a:ext cx="10362895" cy="1828800"/>
+            <a:off x="7315200" y="3200400"/>
+            <a:ext cx="1371600" cy="914400"/>
           </a:xfrm>
-          <a:prstGeom prst="rect">
+          <a:prstGeom prst="roundRect">
             <a:avLst/>
           </a:prstGeom>
           <a:noFill/>
-        </p:spPr>
-        <p:txBody>
-          <a:bodyPr wrap="square">
-            <a:spAutoFit/>
-          </a:bodyPr>
-          <a:lstStyle/>
-          <a:p>
-            <a:pPr>
-              <a:defRPr b="1" sz="5000">
-                <a:solidFill>
-                  <a:srgbClr val="FFFFFF"/>
-                </a:solidFill>
-              </a:defRPr>
-            </a:pPr>
-            <a:r>
-              <a:t>Caso de Éxito: User Management System (UMS)</a:t>
-            </a:r>
-          </a:p>
-          <a:p>
-            <a:pPr>
-              <a:spcBef>
-                <a:spcPts val="1400"/>
-              </a:spcBef>
-              <a:defRPr sz="2400">
-                <a:solidFill>
-                  <a:srgbClr val="3B82F6"/>
-                </a:solidFill>
-              </a:defRPr>
-            </a:pPr>
-            <a:r>
-              <a:t>Aplicando el marco SDLC Evolith a nivel Enterprise.</a:t>
-            </a:r>
-          </a:p>
-        </p:txBody>
-      </p:sp>
-    </p:spTree>
-  </p:cSld>
-  <p:clrMapOvr>
-    <a:masterClrMapping/>
-  </p:clrMapOvr>
-</p:sld>
-</file>
-
-<file path=ppt/slides/slide10.xml><?xml version="1.0" encoding="utf-8"?>
-<p:sld xmlns:a="http://schemas.openxmlformats.org/drawingml/2006/main" xmlns:p="http://schemas.openxmlformats.org/presentationml/2006/main" xmlns:r="http://schemas.openxmlformats.org/officeDocument/2006/relationships">
-  <p:cSld>
-    <p:spTree>
-      <p:nvGrpSpPr>
-        <p:cNvPr id="1" name=""/>
-        <p:cNvGrpSpPr/>
-        <p:nvPr/>
-      </p:nvGrpSpPr>
-      <p:grpSpPr/>
-      <p:sp>
-        <p:nvSpPr>
-          <p:cNvPr id="2" name="Rectangle 1"/>
-          <p:cNvSpPr/>
-          <p:nvPr/>
-        </p:nvSpPr>
-        <p:spPr>
-          <a:xfrm>
-            <a:off x="0" y="0"/>
-            <a:ext cx="12191695" cy="1097280"/>
-          </a:xfrm>
-          <a:prstGeom prst="rect">
-            <a:avLst/>
-          </a:prstGeom>
-          <a:solidFill>
-            <a:srgbClr val="1E3A5F"/>
-          </a:solidFill>
-          <a:ln>
+          <a:ln w="25400">
             <a:solidFill>
-              <a:srgbClr val="1E3A5F"/>
+              <a:srgbClr val="960000"/>
             </a:solidFill>
           </a:ln>
         </p:spPr>
@@ -3297,29 +3358,46 @@
           <a:lstStyle/>
           <a:p>
             <a:pPr algn="ctr"/>
-          </a:p>
-        </p:txBody>
-      </p:sp>
-      <p:sp>
-        <p:nvSpPr>
-          <p:cNvPr id="3" name="Rectangle 2"/>
+            <a:r>
+              <a:rPr sz="1400" b="1">
+                <a:solidFill>
+                  <a:srgbClr val="960000"/>
+                </a:solidFill>
+              </a:rPr>
+              <a:t>Sobrecostes</a:t>
+            </a:r>
+          </a:p>
+          <a:p>
+            <a:pPr algn="ctr"/>
+            <a:r>
+              <a:rPr sz="1400" b="1">
+                <a:solidFill>
+                  <a:srgbClr val="960000"/>
+                </a:solidFill>
+              </a:rPr>
+              <a:t>Retrasos</a:t>
+            </a:r>
+          </a:p>
+        </p:txBody>
+      </p:sp>
+      <p:sp>
+        <p:nvSpPr>
+          <p:cNvPr id="4" name="Rounded Rectangle 3"/>
           <p:cNvSpPr/>
           <p:nvPr/>
         </p:nvSpPr>
         <p:spPr>
           <a:xfrm>
-            <a:off x="0" y="1097280"/>
-            <a:ext cx="12191695" cy="91440"/>
+            <a:off x="1828800" y="1828800"/>
+            <a:ext cx="1828800" cy="914400"/>
           </a:xfrm>
-          <a:prstGeom prst="rect">
+          <a:prstGeom prst="roundRect">
             <a:avLst/>
           </a:prstGeom>
-          <a:solidFill>
-            <a:srgbClr val="3B82F6"/>
-          </a:solidFill>
-          <a:ln>
+          <a:noFill/>
+          <a:ln w="25400">
             <a:solidFill>
-              <a:srgbClr val="3B82F6"/>
+              <a:srgbClr val="A0A0A0"/>
             </a:solidFill>
           </a:ln>
         </p:spPr>
@@ -3342,132 +3420,35 @@
           <a:lstStyle/>
           <a:p>
             <a:pPr algn="ctr"/>
-          </a:p>
-        </p:txBody>
-      </p:sp>
-      <p:sp>
-        <p:nvSpPr>
-          <p:cNvPr id="4" name="TextBox 3"/>
-          <p:cNvSpPr txBox="1"/>
+            <a:r>
+              <a:rPr sz="1400" b="1">
+                <a:solidFill>
+                  <a:srgbClr val="A0A0A0"/>
+                </a:solidFill>
+              </a:rPr>
+              <a:t>Silos Org.</a:t>
+            </a:r>
+          </a:p>
+        </p:txBody>
+      </p:sp>
+      <p:sp>
+        <p:nvSpPr>
+          <p:cNvPr id="5" name="Rounded Rectangle 4"/>
+          <p:cNvSpPr/>
           <p:nvPr/>
         </p:nvSpPr>
         <p:spPr>
           <a:xfrm>
-            <a:off x="457200" y="91440"/>
-            <a:ext cx="11277295" cy="914400"/>
+            <a:off x="3657600" y="4572000"/>
+            <a:ext cx="1828800" cy="914400"/>
           </a:xfrm>
-          <a:prstGeom prst="rect">
+          <a:prstGeom prst="roundRect">
             <a:avLst/>
           </a:prstGeom>
           <a:noFill/>
-        </p:spPr>
-        <p:txBody>
-          <a:bodyPr wrap="none">
-            <a:spAutoFit/>
-          </a:bodyPr>
-          <a:lstStyle/>
-          <a:p>
-            <a:pPr>
-              <a:defRPr b="1" sz="3600">
-                <a:solidFill>
-                  <a:srgbClr val="FFFFFF"/>
-                </a:solidFill>
-              </a:defRPr>
-            </a:pPr>
-            <a:r>
-              <a:t>Por qué UMS recomienda Evolith</a:t>
-            </a:r>
-          </a:p>
-        </p:txBody>
-      </p:sp>
-      <p:sp>
-        <p:nvSpPr>
-          <p:cNvPr id="5" name="TextBox 4"/>
-          <p:cNvSpPr txBox="1"/>
-          <p:nvPr/>
-        </p:nvSpPr>
-        <p:spPr>
-          <a:xfrm>
-            <a:off x="457200" y="1645920"/>
-            <a:ext cx="11277295" cy="5029200"/>
-          </a:xfrm>
-          <a:prstGeom prst="rect">
-            <a:avLst/>
-          </a:prstGeom>
-          <a:noFill/>
-        </p:spPr>
-        <p:txBody>
-          <a:bodyPr wrap="square">
-            <a:spAutoFit/>
-          </a:bodyPr>
-          <a:lstStyle/>
-          <a:p>
-            <a:pPr>
-              <a:defRPr sz="2200">
-                <a:solidFill>
-                  <a:srgbClr val="323232"/>
-                </a:solidFill>
-              </a:defRPr>
-            </a:pPr>
-            <a:r>
-              <a:t>Gobernanza que acelera, no retrasa.</a:t>
-            </a:r>
-          </a:p>
-          <a:p>
-            <a:pPr>
-              <a:spcBef>
-                <a:spcPts val="1400"/>
-              </a:spcBef>
-              <a:defRPr sz="2200">
-                <a:solidFill>
-                  <a:srgbClr val="323232"/>
-                </a:solidFill>
-              </a:defRPr>
-            </a:pPr>
-            <a:r>
-              <a:t>• Transparencia radical.</a:t>
-            </a:r>
-          </a:p>
-        </p:txBody>
-      </p:sp>
-    </p:spTree>
-  </p:cSld>
-  <p:clrMapOvr>
-    <a:masterClrMapping/>
-  </p:clrMapOvr>
-</p:sld>
-</file>
-
-<file path=ppt/slides/slide2.xml><?xml version="1.0" encoding="utf-8"?>
-<p:sld xmlns:a="http://schemas.openxmlformats.org/drawingml/2006/main" xmlns:p="http://schemas.openxmlformats.org/presentationml/2006/main" xmlns:r="http://schemas.openxmlformats.org/officeDocument/2006/relationships">
-  <p:cSld>
-    <p:spTree>
-      <p:nvGrpSpPr>
-        <p:cNvPr id="1" name=""/>
-        <p:cNvGrpSpPr/>
-        <p:nvPr/>
-      </p:nvGrpSpPr>
-      <p:grpSpPr/>
-      <p:sp>
-        <p:nvSpPr>
-          <p:cNvPr id="2" name="Rectangle 1"/>
-          <p:cNvSpPr/>
-          <p:nvPr/>
-        </p:nvSpPr>
-        <p:spPr>
-          <a:xfrm>
-            <a:off x="0" y="0"/>
-            <a:ext cx="12191695" cy="1097280"/>
-          </a:xfrm>
-          <a:prstGeom prst="rect">
-            <a:avLst/>
-          </a:prstGeom>
-          <a:solidFill>
-            <a:srgbClr val="1E3A5F"/>
-          </a:solidFill>
-          <a:ln>
+          <a:ln w="25400">
             <a:solidFill>
-              <a:srgbClr val="1E3A5F"/>
+              <a:srgbClr val="A0A0A0"/>
             </a:solidFill>
           </a:ln>
         </p:spPr>
@@ -3490,29 +3471,35 @@
           <a:lstStyle/>
           <a:p>
             <a:pPr algn="ctr"/>
-          </a:p>
-        </p:txBody>
-      </p:sp>
-      <p:sp>
-        <p:nvSpPr>
-          <p:cNvPr id="3" name="Rectangle 2"/>
+            <a:r>
+              <a:rPr sz="1400" b="1">
+                <a:solidFill>
+                  <a:srgbClr val="A0A0A0"/>
+                </a:solidFill>
+              </a:rPr>
+              <a:t>Deuda Técnica</a:t>
+            </a:r>
+          </a:p>
+        </p:txBody>
+      </p:sp>
+      <p:sp>
+        <p:nvSpPr>
+          <p:cNvPr id="6" name="Rounded Rectangle 5"/>
           <p:cNvSpPr/>
           <p:nvPr/>
         </p:nvSpPr>
         <p:spPr>
           <a:xfrm>
-            <a:off x="0" y="1097280"/>
-            <a:ext cx="12191695" cy="91440"/>
+            <a:off x="5486400" y="1828800"/>
+            <a:ext cx="1828800" cy="914400"/>
           </a:xfrm>
-          <a:prstGeom prst="rect">
+          <a:prstGeom prst="roundRect">
             <a:avLst/>
           </a:prstGeom>
-          <a:solidFill>
-            <a:srgbClr val="3B82F6"/>
-          </a:solidFill>
-          <a:ln>
+          <a:noFill/>
+          <a:ln w="25400">
             <a:solidFill>
-              <a:srgbClr val="3B82F6"/>
+              <a:srgbClr val="A0A0A0"/>
             </a:solidFill>
           </a:ln>
         </p:spPr>
@@ -3535,105 +3522,13 @@
           <a:lstStyle/>
           <a:p>
             <a:pPr algn="ctr"/>
-          </a:p>
-        </p:txBody>
-      </p:sp>
-      <p:sp>
-        <p:nvSpPr>
-          <p:cNvPr id="4" name="TextBox 3"/>
-          <p:cNvSpPr txBox="1"/>
-          <p:nvPr/>
-        </p:nvSpPr>
-        <p:spPr>
-          <a:xfrm>
-            <a:off x="457200" y="91440"/>
-            <a:ext cx="11277295" cy="914400"/>
-          </a:xfrm>
-          <a:prstGeom prst="rect">
-            <a:avLst/>
-          </a:prstGeom>
-          <a:noFill/>
-        </p:spPr>
-        <p:txBody>
-          <a:bodyPr wrap="none">
-            <a:spAutoFit/>
-          </a:bodyPr>
-          <a:lstStyle/>
-          <a:p>
-            <a:pPr>
-              <a:defRPr b="1" sz="3600">
+            <a:r>
+              <a:rPr sz="1400" b="1">
                 <a:solidFill>
-                  <a:srgbClr val="FFFFFF"/>
+                  <a:srgbClr val="A0A0A0"/>
                 </a:solidFill>
-              </a:defRPr>
-            </a:pPr>
-            <a:r>
-              <a:t>El Desafío Original</a:t>
-            </a:r>
-          </a:p>
-        </p:txBody>
-      </p:sp>
-      <p:sp>
-        <p:nvSpPr>
-          <p:cNvPr id="5" name="TextBox 4"/>
-          <p:cNvSpPr txBox="1"/>
-          <p:nvPr/>
-        </p:nvSpPr>
-        <p:spPr>
-          <a:xfrm>
-            <a:off x="457200" y="1645920"/>
-            <a:ext cx="11277295" cy="5029200"/>
-          </a:xfrm>
-          <a:prstGeom prst="rect">
-            <a:avLst/>
-          </a:prstGeom>
-          <a:noFill/>
-        </p:spPr>
-        <p:txBody>
-          <a:bodyPr wrap="square">
-            <a:spAutoFit/>
-          </a:bodyPr>
-          <a:lstStyle/>
-          <a:p>
-            <a:pPr>
-              <a:defRPr sz="2200">
-                <a:solidFill>
-                  <a:srgbClr val="323232"/>
-                </a:solidFill>
-              </a:defRPr>
-            </a:pPr>
-            <a:r>
-              <a:t>UMS enfrentaba sobrecostes y retrasos.</a:t>
-            </a:r>
-          </a:p>
-          <a:p>
-            <a:pPr>
-              <a:spcBef>
-                <a:spcPts val="1400"/>
-              </a:spcBef>
-              <a:defRPr sz="2200">
-                <a:solidFill>
-                  <a:srgbClr val="323232"/>
-                </a:solidFill>
-              </a:defRPr>
-            </a:pPr>
-            <a:r>
-              <a:t>• Silos entre Negocio, Arquitectura y Ops.</a:t>
-            </a:r>
-          </a:p>
-          <a:p>
-            <a:pPr>
-              <a:spcBef>
-                <a:spcPts val="1400"/>
-              </a:spcBef>
-              <a:defRPr sz="2200">
-                <a:solidFill>
-                  <a:srgbClr val="323232"/>
-                </a:solidFill>
-              </a:defRPr>
-            </a:pPr>
-            <a:r>
-              <a:t>• Ausencia de gobierno en accesos corporativos.</a:t>
+              </a:rPr>
+              <a:t>Pruebas Tardías</a:t>
             </a:r>
           </a:p>
         </p:txBody>
@@ -3649,6 +3544,14 @@
 <file path=ppt/slides/slide3.xml><?xml version="1.0" encoding="utf-8"?>
 <p:sld xmlns:a="http://schemas.openxmlformats.org/drawingml/2006/main" xmlns:p="http://schemas.openxmlformats.org/presentationml/2006/main" xmlns:r="http://schemas.openxmlformats.org/officeDocument/2006/relationships">
   <p:cSld>
+    <p:bg>
+      <p:bgPr>
+        <a:solidFill>
+          <a:srgbClr val="121212"/>
+        </a:solidFill>
+        <a:effectLst/>
+      </p:bgPr>
+    </p:bg>
     <p:spTree>
       <p:nvGrpSpPr>
         <p:cNvPr id="1" name=""/>
@@ -3658,24 +3561,22 @@
       <p:grpSpPr/>
       <p:sp>
         <p:nvSpPr>
-          <p:cNvPr id="2" name="Rectangle 1"/>
+          <p:cNvPr id="2" name="Rounded Rectangle 1"/>
           <p:cNvSpPr/>
           <p:nvPr/>
         </p:nvSpPr>
         <p:spPr>
           <a:xfrm>
-            <a:off x="0" y="0"/>
-            <a:ext cx="12191695" cy="1097280"/>
+            <a:off x="914400" y="2743200"/>
+            <a:ext cx="1828800" cy="3657600"/>
           </a:xfrm>
-          <a:prstGeom prst="rect">
+          <a:prstGeom prst="roundRect">
             <a:avLst/>
           </a:prstGeom>
-          <a:solidFill>
-            <a:srgbClr val="1E3A5F"/>
-          </a:solidFill>
-          <a:ln>
+          <a:noFill/>
+          <a:ln w="25400">
             <a:solidFill>
-              <a:srgbClr val="1E3A5F"/>
+              <a:srgbClr val="A0A0A0"/>
             </a:solidFill>
           </a:ln>
         </p:spPr>
@@ -3698,29 +3599,48 @@
           <a:lstStyle/>
           <a:p>
             <a:pPr algn="ctr"/>
-          </a:p>
-        </p:txBody>
-      </p:sp>
-      <p:sp>
-        <p:nvSpPr>
-          <p:cNvPr id="3" name="Rectangle 2"/>
+            <a:r>
+              <a:rPr sz="1400" b="1">
+                <a:solidFill>
+                  <a:srgbClr val="A0A0A0"/>
+                </a:solidFill>
+              </a:rPr>
+              <a:t>TTM Anterior</a:t>
+            </a:r>
+          </a:p>
+          <a:p>
+            <a:pPr algn="ctr"/>
+            <a:r>
+              <a:rPr sz="1400" b="1">
+                <a:solidFill>
+                  <a:srgbClr val="A0A0A0"/>
+                </a:solidFill>
+              </a:rPr>
+              <a:t>(18 meses)</a:t>
+            </a:r>
+          </a:p>
+        </p:txBody>
+      </p:sp>
+      <p:sp>
+        <p:nvSpPr>
+          <p:cNvPr id="3" name="Rounded Rectangle 2"/>
           <p:cNvSpPr/>
           <p:nvPr/>
         </p:nvSpPr>
         <p:spPr>
           <a:xfrm>
-            <a:off x="0" y="1097280"/>
-            <a:ext cx="12191695" cy="91440"/>
+            <a:off x="3200400" y="4572000"/>
+            <a:ext cx="1828800" cy="1828800"/>
           </a:xfrm>
-          <a:prstGeom prst="rect">
+          <a:prstGeom prst="roundRect">
             <a:avLst/>
           </a:prstGeom>
           <a:solidFill>
-            <a:srgbClr val="3B82F6"/>
+            <a:srgbClr val="CAC5B2"/>
           </a:solidFill>
-          <a:ln>
+          <a:ln w="25400">
             <a:solidFill>
-              <a:srgbClr val="3B82F6"/>
+              <a:srgbClr val="121212"/>
             </a:solidFill>
           </a:ln>
         </p:spPr>
@@ -3743,147 +3663,48 @@
           <a:lstStyle/>
           <a:p>
             <a:pPr algn="ctr"/>
-          </a:p>
-        </p:txBody>
-      </p:sp>
-      <p:sp>
-        <p:nvSpPr>
-          <p:cNvPr id="4" name="TextBox 3"/>
-          <p:cNvSpPr txBox="1"/>
+            <a:r>
+              <a:rPr sz="1400" b="1">
+                <a:solidFill>
+                  <a:srgbClr val="121212"/>
+                </a:solidFill>
+              </a:rPr>
+              <a:t>TTM Evolith</a:t>
+            </a:r>
+          </a:p>
+          <a:p>
+            <a:pPr algn="ctr"/>
+            <a:r>
+              <a:rPr sz="1400" b="1">
+                <a:solidFill>
+                  <a:srgbClr val="121212"/>
+                </a:solidFill>
+              </a:rPr>
+              <a:t>(8 meses)</a:t>
+            </a:r>
+          </a:p>
+        </p:txBody>
+      </p:sp>
+      <p:sp>
+        <p:nvSpPr>
+          <p:cNvPr id="4" name="Rounded Rectangle 3"/>
+          <p:cNvSpPr/>
           <p:nvPr/>
         </p:nvSpPr>
         <p:spPr>
           <a:xfrm>
-            <a:off x="457200" y="91440"/>
-            <a:ext cx="11277295" cy="914400"/>
+            <a:off x="5486400" y="1828800"/>
+            <a:ext cx="2743200" cy="914400"/>
           </a:xfrm>
-          <a:prstGeom prst="rect">
-            <a:avLst/>
-          </a:prstGeom>
-          <a:noFill/>
-        </p:spPr>
-        <p:txBody>
-          <a:bodyPr wrap="none">
-            <a:spAutoFit/>
-          </a:bodyPr>
-          <a:lstStyle/>
-          <a:p>
-            <a:pPr>
-              <a:defRPr b="1" sz="3600">
-                <a:solidFill>
-                  <a:srgbClr val="FFFFFF"/>
-                </a:solidFill>
-              </a:defRPr>
-            </a:pPr>
-            <a:r>
-              <a:t>Fundamentando el Proyecto (Fases 1 y 2)</a:t>
-            </a:r>
-          </a:p>
-        </p:txBody>
-      </p:sp>
-      <p:sp>
-        <p:nvSpPr>
-          <p:cNvPr id="5" name="TextBox 4"/>
-          <p:cNvSpPr txBox="1"/>
-          <p:nvPr/>
-        </p:nvSpPr>
-        <p:spPr>
-          <a:xfrm>
-            <a:off x="457200" y="1645920"/>
-            <a:ext cx="11277295" cy="5029200"/>
-          </a:xfrm>
-          <a:prstGeom prst="rect">
-            <a:avLst/>
-          </a:prstGeom>
-          <a:noFill/>
-        </p:spPr>
-        <p:txBody>
-          <a:bodyPr wrap="square">
-            <a:spAutoFit/>
-          </a:bodyPr>
-          <a:lstStyle/>
-          <a:p>
-            <a:pPr>
-              <a:defRPr sz="2200">
-                <a:solidFill>
-                  <a:srgbClr val="323232"/>
-                </a:solidFill>
-              </a:defRPr>
-            </a:pPr>
-            <a:r>
-              <a:t>Business Case sólido para el Portal Industrial.</a:t>
-            </a:r>
-          </a:p>
-          <a:p>
-            <a:pPr>
-              <a:spcBef>
-                <a:spcPts val="1400"/>
-              </a:spcBef>
-              <a:defRPr sz="2200">
-                <a:solidFill>
-                  <a:srgbClr val="323232"/>
-                </a:solidFill>
-              </a:defRPr>
-            </a:pPr>
-            <a:r>
-              <a:t>• 45 historias de usuario priorizadas (MoSCoW).</a:t>
-            </a:r>
-          </a:p>
-          <a:p>
-            <a:pPr>
-              <a:spcBef>
-                <a:spcPts val="1400"/>
-              </a:spcBef>
-              <a:defRPr sz="2200">
-                <a:solidFill>
-                  <a:srgbClr val="323232"/>
-                </a:solidFill>
-              </a:defRPr>
-            </a:pPr>
-            <a:r>
-              <a:t>• Aprobación de Gate 1.</a:t>
-            </a:r>
-          </a:p>
-        </p:txBody>
-      </p:sp>
-    </p:spTree>
-  </p:cSld>
-  <p:clrMapOvr>
-    <a:masterClrMapping/>
-  </p:clrMapOvr>
-</p:sld>
-</file>
-
-<file path=ppt/slides/slide4.xml><?xml version="1.0" encoding="utf-8"?>
-<p:sld xmlns:a="http://schemas.openxmlformats.org/drawingml/2006/main" xmlns:p="http://schemas.openxmlformats.org/presentationml/2006/main" xmlns:r="http://schemas.openxmlformats.org/officeDocument/2006/relationships">
-  <p:cSld>
-    <p:spTree>
-      <p:nvGrpSpPr>
-        <p:cNvPr id="1" name=""/>
-        <p:cNvGrpSpPr/>
-        <p:nvPr/>
-      </p:nvGrpSpPr>
-      <p:grpSpPr/>
-      <p:sp>
-        <p:nvSpPr>
-          <p:cNvPr id="2" name="Rectangle 1"/>
-          <p:cNvSpPr/>
-          <p:nvPr/>
-        </p:nvSpPr>
-        <p:spPr>
-          <a:xfrm>
-            <a:off x="0" y="0"/>
-            <a:ext cx="12191695" cy="1097280"/>
-          </a:xfrm>
-          <a:prstGeom prst="rect">
+          <a:prstGeom prst="roundRect">
             <a:avLst/>
           </a:prstGeom>
           <a:solidFill>
-            <a:srgbClr val="1E3A5F"/>
+            <a:srgbClr val="CAC5B2"/>
           </a:solidFill>
-          <a:ln>
+          <a:ln w="25400">
             <a:solidFill>
-              <a:srgbClr val="1E3A5F"/>
+              <a:srgbClr val="121212"/>
             </a:solidFill>
           </a:ln>
         </p:spPr>
@@ -3906,1175 +3727,13 @@
           <a:lstStyle/>
           <a:p>
             <a:pPr algn="ctr"/>
-          </a:p>
-        </p:txBody>
-      </p:sp>
-      <p:sp>
-        <p:nvSpPr>
-          <p:cNvPr id="3" name="Rectangle 2"/>
-          <p:cNvSpPr/>
-          <p:nvPr/>
-        </p:nvSpPr>
-        <p:spPr>
-          <a:xfrm>
-            <a:off x="0" y="1097280"/>
-            <a:ext cx="12191695" cy="91440"/>
-          </a:xfrm>
-          <a:prstGeom prst="rect">
-            <a:avLst/>
-          </a:prstGeom>
-          <a:solidFill>
-            <a:srgbClr val="3B82F6"/>
-          </a:solidFill>
-          <a:ln>
-            <a:solidFill>
-              <a:srgbClr val="3B82F6"/>
-            </a:solidFill>
-          </a:ln>
-        </p:spPr>
-        <p:style>
-          <a:lnRef idx="1">
-            <a:schemeClr val="accent1"/>
-          </a:lnRef>
-          <a:fillRef idx="3">
-            <a:schemeClr val="accent1"/>
-          </a:fillRef>
-          <a:effectRef idx="2">
-            <a:schemeClr val="accent1"/>
-          </a:effectRef>
-          <a:fontRef idx="minor">
-            <a:schemeClr val="lt1"/>
-          </a:fontRef>
-        </p:style>
-        <p:txBody>
-          <a:bodyPr rtlCol="0" anchor="ctr"/>
-          <a:lstStyle/>
-          <a:p>
-            <a:pPr algn="ctr"/>
-          </a:p>
-        </p:txBody>
-      </p:sp>
-      <p:sp>
-        <p:nvSpPr>
-          <p:cNvPr id="4" name="TextBox 3"/>
-          <p:cNvSpPr txBox="1"/>
-          <p:nvPr/>
-        </p:nvSpPr>
-        <p:spPr>
-          <a:xfrm>
-            <a:off x="457200" y="91440"/>
-            <a:ext cx="11277295" cy="914400"/>
-          </a:xfrm>
-          <a:prstGeom prst="rect">
-            <a:avLst/>
-          </a:prstGeom>
-          <a:noFill/>
-        </p:spPr>
-        <p:txBody>
-          <a:bodyPr wrap="none">
-            <a:spAutoFit/>
-          </a:bodyPr>
-          <a:lstStyle/>
-          <a:p>
-            <a:pPr>
-              <a:defRPr b="1" sz="3600">
+            <a:r>
+              <a:rPr sz="1400" b="1">
                 <a:solidFill>
-                  <a:srgbClr val="FFFFFF"/>
+                  <a:srgbClr val="121212"/>
                 </a:solidFill>
-              </a:defRPr>
-            </a:pPr>
-            <a:r>
-              <a:t>Arquitectura y Código Trazable (Fases 3 y 4)</a:t>
-            </a:r>
-          </a:p>
-        </p:txBody>
-      </p:sp>
-      <p:sp>
-        <p:nvSpPr>
-          <p:cNvPr id="5" name="TextBox 4"/>
-          <p:cNvSpPr txBox="1"/>
-          <p:nvPr/>
-        </p:nvSpPr>
-        <p:spPr>
-          <a:xfrm>
-            <a:off x="457200" y="1645920"/>
-            <a:ext cx="11277295" cy="5029200"/>
-          </a:xfrm>
-          <a:prstGeom prst="rect">
-            <a:avLst/>
-          </a:prstGeom>
-          <a:noFill/>
-        </p:spPr>
-        <p:txBody>
-          <a:bodyPr wrap="square">
-            <a:spAutoFit/>
-          </a:bodyPr>
-          <a:lstStyle/>
-          <a:p>
-            <a:pPr>
-              <a:defRPr sz="2200">
-                <a:solidFill>
-                  <a:srgbClr val="323232"/>
-                </a:solidFill>
-              </a:defRPr>
-            </a:pPr>
-            <a:r>
-              <a:t>Blueprint de Arquitectura Hexagonal.</a:t>
-            </a:r>
-          </a:p>
-          <a:p>
-            <a:pPr>
-              <a:spcBef>
-                <a:spcPts val="1400"/>
-              </a:spcBef>
-              <a:defRPr sz="2200">
-                <a:solidFill>
-                  <a:srgbClr val="323232"/>
-                </a:solidFill>
-              </a:defRPr>
-            </a:pPr>
-            <a:r>
-              <a:t>• 5 ADRs clave documentados.</a:t>
-            </a:r>
-          </a:p>
-          <a:p>
-            <a:pPr>
-              <a:spcBef>
-                <a:spcPts val="1400"/>
-              </a:spcBef>
-              <a:defRPr sz="2200">
-                <a:solidFill>
-                  <a:srgbClr val="323232"/>
-                </a:solidFill>
-              </a:defRPr>
-            </a:pPr>
-            <a:r>
-              <a:t>• Quality Gates: SonarQube bloqueando PRs (&lt;80%).</a:t>
-            </a:r>
-          </a:p>
-        </p:txBody>
-      </p:sp>
-    </p:spTree>
-  </p:cSld>
-  <p:clrMapOvr>
-    <a:masterClrMapping/>
-  </p:clrMapOvr>
-</p:sld>
-</file>
-
-<file path=ppt/slides/slide5.xml><?xml version="1.0" encoding="utf-8"?>
-<p:sld xmlns:a="http://schemas.openxmlformats.org/drawingml/2006/main" xmlns:p="http://schemas.openxmlformats.org/presentationml/2006/main" xmlns:r="http://schemas.openxmlformats.org/officeDocument/2006/relationships">
-  <p:cSld>
-    <p:spTree>
-      <p:nvGrpSpPr>
-        <p:cNvPr id="1" name=""/>
-        <p:cNvGrpSpPr/>
-        <p:nvPr/>
-      </p:nvGrpSpPr>
-      <p:grpSpPr/>
-      <p:sp>
-        <p:nvSpPr>
-          <p:cNvPr id="2" name="Rectangle 1"/>
-          <p:cNvSpPr/>
-          <p:nvPr/>
-        </p:nvSpPr>
-        <p:spPr>
-          <a:xfrm>
-            <a:off x="0" y="0"/>
-            <a:ext cx="12191695" cy="1097280"/>
-          </a:xfrm>
-          <a:prstGeom prst="rect">
-            <a:avLst/>
-          </a:prstGeom>
-          <a:solidFill>
-            <a:srgbClr val="1E3A5F"/>
-          </a:solidFill>
-          <a:ln>
-            <a:solidFill>
-              <a:srgbClr val="1E3A5F"/>
-            </a:solidFill>
-          </a:ln>
-        </p:spPr>
-        <p:style>
-          <a:lnRef idx="1">
-            <a:schemeClr val="accent1"/>
-          </a:lnRef>
-          <a:fillRef idx="3">
-            <a:schemeClr val="accent1"/>
-          </a:fillRef>
-          <a:effectRef idx="2">
-            <a:schemeClr val="accent1"/>
-          </a:effectRef>
-          <a:fontRef idx="minor">
-            <a:schemeClr val="lt1"/>
-          </a:fontRef>
-        </p:style>
-        <p:txBody>
-          <a:bodyPr rtlCol="0" anchor="ctr"/>
-          <a:lstStyle/>
-          <a:p>
-            <a:pPr algn="ctr"/>
-          </a:p>
-        </p:txBody>
-      </p:sp>
-      <p:sp>
-        <p:nvSpPr>
-          <p:cNvPr id="3" name="Rectangle 2"/>
-          <p:cNvSpPr/>
-          <p:nvPr/>
-        </p:nvSpPr>
-        <p:spPr>
-          <a:xfrm>
-            <a:off x="0" y="1097280"/>
-            <a:ext cx="12191695" cy="91440"/>
-          </a:xfrm>
-          <a:prstGeom prst="rect">
-            <a:avLst/>
-          </a:prstGeom>
-          <a:solidFill>
-            <a:srgbClr val="3B82F6"/>
-          </a:solidFill>
-          <a:ln>
-            <a:solidFill>
-              <a:srgbClr val="3B82F6"/>
-            </a:solidFill>
-          </a:ln>
-        </p:spPr>
-        <p:style>
-          <a:lnRef idx="1">
-            <a:schemeClr val="accent1"/>
-          </a:lnRef>
-          <a:fillRef idx="3">
-            <a:schemeClr val="accent1"/>
-          </a:fillRef>
-          <a:effectRef idx="2">
-            <a:schemeClr val="accent1"/>
-          </a:effectRef>
-          <a:fontRef idx="minor">
-            <a:schemeClr val="lt1"/>
-          </a:fontRef>
-        </p:style>
-        <p:txBody>
-          <a:bodyPr rtlCol="0" anchor="ctr"/>
-          <a:lstStyle/>
-          <a:p>
-            <a:pPr algn="ctr"/>
-          </a:p>
-        </p:txBody>
-      </p:sp>
-      <p:sp>
-        <p:nvSpPr>
-          <p:cNvPr id="4" name="TextBox 3"/>
-          <p:cNvSpPr txBox="1"/>
-          <p:nvPr/>
-        </p:nvSpPr>
-        <p:spPr>
-          <a:xfrm>
-            <a:off x="457200" y="91440"/>
-            <a:ext cx="11277295" cy="914400"/>
-          </a:xfrm>
-          <a:prstGeom prst="rect">
-            <a:avLst/>
-          </a:prstGeom>
-          <a:noFill/>
-        </p:spPr>
-        <p:txBody>
-          <a:bodyPr wrap="none">
-            <a:spAutoFit/>
-          </a:bodyPr>
-          <a:lstStyle/>
-          <a:p>
-            <a:pPr>
-              <a:defRPr b="1" sz="3600">
-                <a:solidFill>
-                  <a:srgbClr val="FFFFFF"/>
-                </a:solidFill>
-              </a:defRPr>
-            </a:pPr>
-            <a:r>
-              <a:t>Validación Rigurosa y Release (Fases 5 y 6)</a:t>
-            </a:r>
-          </a:p>
-        </p:txBody>
-      </p:sp>
-      <p:sp>
-        <p:nvSpPr>
-          <p:cNvPr id="5" name="TextBox 4"/>
-          <p:cNvSpPr txBox="1"/>
-          <p:nvPr/>
-        </p:nvSpPr>
-        <p:spPr>
-          <a:xfrm>
-            <a:off x="457200" y="1645920"/>
-            <a:ext cx="11277295" cy="5029200"/>
-          </a:xfrm>
-          <a:prstGeom prst="rect">
-            <a:avLst/>
-          </a:prstGeom>
-          <a:noFill/>
-        </p:spPr>
-        <p:txBody>
-          <a:bodyPr wrap="square">
-            <a:spAutoFit/>
-          </a:bodyPr>
-          <a:lstStyle/>
-          <a:p>
-            <a:pPr>
-              <a:defRPr sz="2200">
-                <a:solidFill>
-                  <a:srgbClr val="323232"/>
-                </a:solidFill>
-              </a:defRPr>
-            </a:pPr>
-            <a:r>
-              <a:t>Ejecución del Plan Maestro de Pruebas.</a:t>
-            </a:r>
-          </a:p>
-          <a:p>
-            <a:pPr>
-              <a:spcBef>
-                <a:spcPts val="1400"/>
-              </a:spcBef>
-              <a:defRPr sz="2200">
-                <a:solidFill>
-                  <a:srgbClr val="323232"/>
-                </a:solidFill>
-              </a:defRPr>
-            </a:pPr>
-            <a:r>
-              <a:t>• Despliegue con Runbooks automatizados.</a:t>
-            </a:r>
-          </a:p>
-          <a:p>
-            <a:pPr>
-              <a:spcBef>
-                <a:spcPts val="1400"/>
-              </a:spcBef>
-              <a:defRPr sz="2200">
-                <a:solidFill>
-                  <a:srgbClr val="323232"/>
-                </a:solidFill>
-              </a:defRPr>
-            </a:pPr>
-            <a:r>
-              <a:t>• Cero fricción en ventana de mantenimiento.</a:t>
-            </a:r>
-          </a:p>
-        </p:txBody>
-      </p:sp>
-    </p:spTree>
-  </p:cSld>
-  <p:clrMapOvr>
-    <a:masterClrMapping/>
-  </p:clrMapOvr>
-</p:sld>
-</file>
-
-<file path=ppt/slides/slide6.xml><?xml version="1.0" encoding="utf-8"?>
-<p:sld xmlns:a="http://schemas.openxmlformats.org/drawingml/2006/main" xmlns:p="http://schemas.openxmlformats.org/presentationml/2006/main" xmlns:r="http://schemas.openxmlformats.org/officeDocument/2006/relationships">
-  <p:cSld>
-    <p:spTree>
-      <p:nvGrpSpPr>
-        <p:cNvPr id="1" name=""/>
-        <p:cNvGrpSpPr/>
-        <p:nvPr/>
-      </p:nvGrpSpPr>
-      <p:grpSpPr/>
-      <p:sp>
-        <p:nvSpPr>
-          <p:cNvPr id="2" name="Rectangle 1"/>
-          <p:cNvSpPr/>
-          <p:nvPr/>
-        </p:nvSpPr>
-        <p:spPr>
-          <a:xfrm>
-            <a:off x="0" y="0"/>
-            <a:ext cx="12191695" cy="1097280"/>
-          </a:xfrm>
-          <a:prstGeom prst="rect">
-            <a:avLst/>
-          </a:prstGeom>
-          <a:solidFill>
-            <a:srgbClr val="1E3A5F"/>
-          </a:solidFill>
-          <a:ln>
-            <a:solidFill>
-              <a:srgbClr val="1E3A5F"/>
-            </a:solidFill>
-          </a:ln>
-        </p:spPr>
-        <p:style>
-          <a:lnRef idx="1">
-            <a:schemeClr val="accent1"/>
-          </a:lnRef>
-          <a:fillRef idx="3">
-            <a:schemeClr val="accent1"/>
-          </a:fillRef>
-          <a:effectRef idx="2">
-            <a:schemeClr val="accent1"/>
-          </a:effectRef>
-          <a:fontRef idx="minor">
-            <a:schemeClr val="lt1"/>
-          </a:fontRef>
-        </p:style>
-        <p:txBody>
-          <a:bodyPr rtlCol="0" anchor="ctr"/>
-          <a:lstStyle/>
-          <a:p>
-            <a:pPr algn="ctr"/>
-          </a:p>
-        </p:txBody>
-      </p:sp>
-      <p:sp>
-        <p:nvSpPr>
-          <p:cNvPr id="3" name="Rectangle 2"/>
-          <p:cNvSpPr/>
-          <p:nvPr/>
-        </p:nvSpPr>
-        <p:spPr>
-          <a:xfrm>
-            <a:off x="0" y="1097280"/>
-            <a:ext cx="12191695" cy="91440"/>
-          </a:xfrm>
-          <a:prstGeom prst="rect">
-            <a:avLst/>
-          </a:prstGeom>
-          <a:solidFill>
-            <a:srgbClr val="3B82F6"/>
-          </a:solidFill>
-          <a:ln>
-            <a:solidFill>
-              <a:srgbClr val="3B82F6"/>
-            </a:solidFill>
-          </a:ln>
-        </p:spPr>
-        <p:style>
-          <a:lnRef idx="1">
-            <a:schemeClr val="accent1"/>
-          </a:lnRef>
-          <a:fillRef idx="3">
-            <a:schemeClr val="accent1"/>
-          </a:fillRef>
-          <a:effectRef idx="2">
-            <a:schemeClr val="accent1"/>
-          </a:effectRef>
-          <a:fontRef idx="minor">
-            <a:schemeClr val="lt1"/>
-          </a:fontRef>
-        </p:style>
-        <p:txBody>
-          <a:bodyPr rtlCol="0" anchor="ctr"/>
-          <a:lstStyle/>
-          <a:p>
-            <a:pPr algn="ctr"/>
-          </a:p>
-        </p:txBody>
-      </p:sp>
-      <p:sp>
-        <p:nvSpPr>
-          <p:cNvPr id="4" name="TextBox 3"/>
-          <p:cNvSpPr txBox="1"/>
-          <p:nvPr/>
-        </p:nvSpPr>
-        <p:spPr>
-          <a:xfrm>
-            <a:off x="457200" y="91440"/>
-            <a:ext cx="11277295" cy="914400"/>
-          </a:xfrm>
-          <a:prstGeom prst="rect">
-            <a:avLst/>
-          </a:prstGeom>
-          <a:noFill/>
-        </p:spPr>
-        <p:txBody>
-          <a:bodyPr wrap="none">
-            <a:spAutoFit/>
-          </a:bodyPr>
-          <a:lstStyle/>
-          <a:p>
-            <a:pPr>
-              <a:defRPr b="1" sz="3600">
-                <a:solidFill>
-                  <a:srgbClr val="FFFFFF"/>
-                </a:solidFill>
-              </a:defRPr>
-            </a:pPr>
-            <a:r>
-              <a:t>Mantenimiento del Valor (Fases 7 y 8)</a:t>
-            </a:r>
-          </a:p>
-        </p:txBody>
-      </p:sp>
-      <p:sp>
-        <p:nvSpPr>
-          <p:cNvPr id="5" name="TextBox 4"/>
-          <p:cNvSpPr txBox="1"/>
-          <p:nvPr/>
-        </p:nvSpPr>
-        <p:spPr>
-          <a:xfrm>
-            <a:off x="457200" y="1645920"/>
-            <a:ext cx="11277295" cy="5029200"/>
-          </a:xfrm>
-          <a:prstGeom prst="rect">
-            <a:avLst/>
-          </a:prstGeom>
-          <a:noFill/>
-        </p:spPr>
-        <p:txBody>
-          <a:bodyPr wrap="square">
-            <a:spAutoFit/>
-          </a:bodyPr>
-          <a:lstStyle/>
-          <a:p>
-            <a:pPr>
-              <a:defRPr sz="2200">
-                <a:solidFill>
-                  <a:srgbClr val="323232"/>
-                </a:solidFill>
-              </a:defRPr>
-            </a:pPr>
-            <a:r>
-              <a:t>Dashboard Operaciones en tiempo real.</a:t>
-            </a:r>
-          </a:p>
-          <a:p>
-            <a:pPr>
-              <a:spcBef>
-                <a:spcPts val="1400"/>
-              </a:spcBef>
-              <a:defRPr sz="2200">
-                <a:solidFill>
-                  <a:srgbClr val="323232"/>
-                </a:solidFill>
-              </a:defRPr>
-            </a:pPr>
-            <a:r>
-              <a:t>• Checklist para retirar módulos Legacy.</a:t>
-            </a:r>
-          </a:p>
-        </p:txBody>
-      </p:sp>
-    </p:spTree>
-  </p:cSld>
-  <p:clrMapOvr>
-    <a:masterClrMapping/>
-  </p:clrMapOvr>
-</p:sld>
-</file>
-
-<file path=ppt/slides/slide7.xml><?xml version="1.0" encoding="utf-8"?>
-<p:sld xmlns:a="http://schemas.openxmlformats.org/drawingml/2006/main" xmlns:p="http://schemas.openxmlformats.org/presentationml/2006/main" xmlns:r="http://schemas.openxmlformats.org/officeDocument/2006/relationships">
-  <p:cSld>
-    <p:spTree>
-      <p:nvGrpSpPr>
-        <p:cNvPr id="1" name=""/>
-        <p:cNvGrpSpPr/>
-        <p:nvPr/>
-      </p:nvGrpSpPr>
-      <p:grpSpPr/>
-      <p:sp>
-        <p:nvSpPr>
-          <p:cNvPr id="2" name="Rectangle 1"/>
-          <p:cNvSpPr/>
-          <p:nvPr/>
-        </p:nvSpPr>
-        <p:spPr>
-          <a:xfrm>
-            <a:off x="0" y="0"/>
-            <a:ext cx="12191695" cy="1097280"/>
-          </a:xfrm>
-          <a:prstGeom prst="rect">
-            <a:avLst/>
-          </a:prstGeom>
-          <a:solidFill>
-            <a:srgbClr val="1E3A5F"/>
-          </a:solidFill>
-          <a:ln>
-            <a:solidFill>
-              <a:srgbClr val="1E3A5F"/>
-            </a:solidFill>
-          </a:ln>
-        </p:spPr>
-        <p:style>
-          <a:lnRef idx="1">
-            <a:schemeClr val="accent1"/>
-          </a:lnRef>
-          <a:fillRef idx="3">
-            <a:schemeClr val="accent1"/>
-          </a:fillRef>
-          <a:effectRef idx="2">
-            <a:schemeClr val="accent1"/>
-          </a:effectRef>
-          <a:fontRef idx="minor">
-            <a:schemeClr val="lt1"/>
-          </a:fontRef>
-        </p:style>
-        <p:txBody>
-          <a:bodyPr rtlCol="0" anchor="ctr"/>
-          <a:lstStyle/>
-          <a:p>
-            <a:pPr algn="ctr"/>
-          </a:p>
-        </p:txBody>
-      </p:sp>
-      <p:sp>
-        <p:nvSpPr>
-          <p:cNvPr id="3" name="Rectangle 2"/>
-          <p:cNvSpPr/>
-          <p:nvPr/>
-        </p:nvSpPr>
-        <p:spPr>
-          <a:xfrm>
-            <a:off x="0" y="1097280"/>
-            <a:ext cx="12191695" cy="91440"/>
-          </a:xfrm>
-          <a:prstGeom prst="rect">
-            <a:avLst/>
-          </a:prstGeom>
-          <a:solidFill>
-            <a:srgbClr val="3B82F6"/>
-          </a:solidFill>
-          <a:ln>
-            <a:solidFill>
-              <a:srgbClr val="3B82F6"/>
-            </a:solidFill>
-          </a:ln>
-        </p:spPr>
-        <p:style>
-          <a:lnRef idx="1">
-            <a:schemeClr val="accent1"/>
-          </a:lnRef>
-          <a:fillRef idx="3">
-            <a:schemeClr val="accent1"/>
-          </a:fillRef>
-          <a:effectRef idx="2">
-            <a:schemeClr val="accent1"/>
-          </a:effectRef>
-          <a:fontRef idx="minor">
-            <a:schemeClr val="lt1"/>
-          </a:fontRef>
-        </p:style>
-        <p:txBody>
-          <a:bodyPr rtlCol="0" anchor="ctr"/>
-          <a:lstStyle/>
-          <a:p>
-            <a:pPr algn="ctr"/>
-          </a:p>
-        </p:txBody>
-      </p:sp>
-      <p:sp>
-        <p:nvSpPr>
-          <p:cNvPr id="4" name="TextBox 3"/>
-          <p:cNvSpPr txBox="1"/>
-          <p:nvPr/>
-        </p:nvSpPr>
-        <p:spPr>
-          <a:xfrm>
-            <a:off x="457200" y="91440"/>
-            <a:ext cx="11277295" cy="914400"/>
-          </a:xfrm>
-          <a:prstGeom prst="rect">
-            <a:avLst/>
-          </a:prstGeom>
-          <a:noFill/>
-        </p:spPr>
-        <p:txBody>
-          <a:bodyPr wrap="none">
-            <a:spAutoFit/>
-          </a:bodyPr>
-          <a:lstStyle/>
-          <a:p>
-            <a:pPr>
-              <a:defRPr b="1" sz="3600">
-                <a:solidFill>
-                  <a:srgbClr val="FFFFFF"/>
-                </a:solidFill>
-              </a:defRPr>
-            </a:pPr>
-            <a:r>
-              <a:t>El Impacto en UMS</a:t>
-            </a:r>
-          </a:p>
-        </p:txBody>
-      </p:sp>
-      <p:sp>
-        <p:nvSpPr>
-          <p:cNvPr id="5" name="TextBox 4"/>
-          <p:cNvSpPr txBox="1"/>
-          <p:nvPr/>
-        </p:nvSpPr>
-        <p:spPr>
-          <a:xfrm>
-            <a:off x="457200" y="1645920"/>
-            <a:ext cx="11277295" cy="5029200"/>
-          </a:xfrm>
-          <a:prstGeom prst="rect">
-            <a:avLst/>
-          </a:prstGeom>
-          <a:noFill/>
-        </p:spPr>
-        <p:txBody>
-          <a:bodyPr wrap="square">
-            <a:spAutoFit/>
-          </a:bodyPr>
-          <a:lstStyle/>
-          <a:p>
-            <a:pPr>
-              <a:defRPr sz="2200">
-                <a:solidFill>
-                  <a:srgbClr val="323232"/>
-                </a:solidFill>
-              </a:defRPr>
-            </a:pPr>
-            <a:r>
-              <a:t>Time-to-Market: de 18 a 8 meses.</a:t>
-            </a:r>
-          </a:p>
-          <a:p>
-            <a:pPr>
-              <a:spcBef>
-                <a:spcPts val="1400"/>
-              </a:spcBef>
-              <a:defRPr sz="2200">
-                <a:solidFill>
-                  <a:srgbClr val="323232"/>
-                </a:solidFill>
-              </a:defRPr>
-            </a:pPr>
-            <a:r>
-              <a:t>• Calidad: -50% incidentes P1.</a:t>
-            </a:r>
-          </a:p>
-          <a:p>
-            <a:pPr>
-              <a:spcBef>
-                <a:spcPts val="1400"/>
-              </a:spcBef>
-              <a:defRPr sz="2200">
-                <a:solidFill>
-                  <a:srgbClr val="323232"/>
-                </a:solidFill>
-              </a:defRPr>
-            </a:pPr>
-            <a:r>
-              <a:t>• Seguridad: Auditoría limpia.</a:t>
-            </a:r>
-          </a:p>
-        </p:txBody>
-      </p:sp>
-    </p:spTree>
-  </p:cSld>
-  <p:clrMapOvr>
-    <a:masterClrMapping/>
-  </p:clrMapOvr>
-</p:sld>
-</file>
-
-<file path=ppt/slides/slide8.xml><?xml version="1.0" encoding="utf-8"?>
-<p:sld xmlns:a="http://schemas.openxmlformats.org/drawingml/2006/main" xmlns:p="http://schemas.openxmlformats.org/presentationml/2006/main" xmlns:r="http://schemas.openxmlformats.org/officeDocument/2006/relationships">
-  <p:cSld>
-    <p:spTree>
-      <p:nvGrpSpPr>
-        <p:cNvPr id="1" name=""/>
-        <p:cNvGrpSpPr/>
-        <p:nvPr/>
-      </p:nvGrpSpPr>
-      <p:grpSpPr/>
-      <p:sp>
-        <p:nvSpPr>
-          <p:cNvPr id="2" name="Rectangle 1"/>
-          <p:cNvSpPr/>
-          <p:nvPr/>
-        </p:nvSpPr>
-        <p:spPr>
-          <a:xfrm>
-            <a:off x="0" y="0"/>
-            <a:ext cx="12191695" cy="1097280"/>
-          </a:xfrm>
-          <a:prstGeom prst="rect">
-            <a:avLst/>
-          </a:prstGeom>
-          <a:solidFill>
-            <a:srgbClr val="1E3A5F"/>
-          </a:solidFill>
-          <a:ln>
-            <a:solidFill>
-              <a:srgbClr val="1E3A5F"/>
-            </a:solidFill>
-          </a:ln>
-        </p:spPr>
-        <p:style>
-          <a:lnRef idx="1">
-            <a:schemeClr val="accent1"/>
-          </a:lnRef>
-          <a:fillRef idx="3">
-            <a:schemeClr val="accent1"/>
-          </a:fillRef>
-          <a:effectRef idx="2">
-            <a:schemeClr val="accent1"/>
-          </a:effectRef>
-          <a:fontRef idx="minor">
-            <a:schemeClr val="lt1"/>
-          </a:fontRef>
-        </p:style>
-        <p:txBody>
-          <a:bodyPr rtlCol="0" anchor="ctr"/>
-          <a:lstStyle/>
-          <a:p>
-            <a:pPr algn="ctr"/>
-          </a:p>
-        </p:txBody>
-      </p:sp>
-      <p:sp>
-        <p:nvSpPr>
-          <p:cNvPr id="3" name="Rectangle 2"/>
-          <p:cNvSpPr/>
-          <p:nvPr/>
-        </p:nvSpPr>
-        <p:spPr>
-          <a:xfrm>
-            <a:off x="0" y="1097280"/>
-            <a:ext cx="12191695" cy="91440"/>
-          </a:xfrm>
-          <a:prstGeom prst="rect">
-            <a:avLst/>
-          </a:prstGeom>
-          <a:solidFill>
-            <a:srgbClr val="3B82F6"/>
-          </a:solidFill>
-          <a:ln>
-            <a:solidFill>
-              <a:srgbClr val="3B82F6"/>
-            </a:solidFill>
-          </a:ln>
-        </p:spPr>
-        <p:style>
-          <a:lnRef idx="1">
-            <a:schemeClr val="accent1"/>
-          </a:lnRef>
-          <a:fillRef idx="3">
-            <a:schemeClr val="accent1"/>
-          </a:fillRef>
-          <a:effectRef idx="2">
-            <a:schemeClr val="accent1"/>
-          </a:effectRef>
-          <a:fontRef idx="minor">
-            <a:schemeClr val="lt1"/>
-          </a:fontRef>
-        </p:style>
-        <p:txBody>
-          <a:bodyPr rtlCol="0" anchor="ctr"/>
-          <a:lstStyle/>
-          <a:p>
-            <a:pPr algn="ctr"/>
-          </a:p>
-        </p:txBody>
-      </p:sp>
-      <p:sp>
-        <p:nvSpPr>
-          <p:cNvPr id="4" name="TextBox 3"/>
-          <p:cNvSpPr txBox="1"/>
-          <p:nvPr/>
-        </p:nvSpPr>
-        <p:spPr>
-          <a:xfrm>
-            <a:off x="457200" y="91440"/>
-            <a:ext cx="11277295" cy="914400"/>
-          </a:xfrm>
-          <a:prstGeom prst="rect">
-            <a:avLst/>
-          </a:prstGeom>
-          <a:noFill/>
-        </p:spPr>
-        <p:txBody>
-          <a:bodyPr wrap="none">
-            <a:spAutoFit/>
-          </a:bodyPr>
-          <a:lstStyle/>
-          <a:p>
-            <a:pPr>
-              <a:defRPr b="1" sz="3600">
-                <a:solidFill>
-                  <a:srgbClr val="FFFFFF"/>
-                </a:solidFill>
-              </a:defRPr>
-            </a:pPr>
-            <a:r>
-              <a:t>La Visión de Liderazgo</a:t>
-            </a:r>
-          </a:p>
-        </p:txBody>
-      </p:sp>
-      <p:sp>
-        <p:nvSpPr>
-          <p:cNvPr id="5" name="TextBox 4"/>
-          <p:cNvSpPr txBox="1"/>
-          <p:nvPr/>
-        </p:nvSpPr>
-        <p:spPr>
-          <a:xfrm>
-            <a:off x="457200" y="1645920"/>
-            <a:ext cx="11277295" cy="5029200"/>
-          </a:xfrm>
-          <a:prstGeom prst="rect">
-            <a:avLst/>
-          </a:prstGeom>
-          <a:noFill/>
-        </p:spPr>
-        <p:txBody>
-          <a:bodyPr wrap="square">
-            <a:spAutoFit/>
-          </a:bodyPr>
-          <a:lstStyle/>
-          <a:p>
-            <a:pPr>
-              <a:defRPr sz="2200">
-                <a:solidFill>
-                  <a:srgbClr val="323232"/>
-                </a:solidFill>
-              </a:defRPr>
-            </a:pPr>
-            <a:r>
-              <a:t>Evolith es un lenguaje común.</a:t>
-            </a:r>
-          </a:p>
-          <a:p>
-            <a:pPr>
-              <a:spcBef>
-                <a:spcPts val="1400"/>
-              </a:spcBef>
-              <a:defRPr sz="2200">
-                <a:solidFill>
-                  <a:srgbClr val="323232"/>
-                </a:solidFill>
-              </a:defRPr>
-            </a:pPr>
-            <a:r>
-              <a:t>• Garantiza valor sin riesgos ocultos.</a:t>
-            </a:r>
-          </a:p>
-          <a:p>
-            <a:pPr>
-              <a:spcBef>
-                <a:spcPts val="1400"/>
-              </a:spcBef>
-              <a:defRPr sz="2200">
-                <a:solidFill>
-                  <a:srgbClr val="323232"/>
-                </a:solidFill>
-              </a:defRPr>
-            </a:pPr>
-            <a:r>
-              <a:t>• Laura Mendes, CIO UMS</a:t>
-            </a:r>
-          </a:p>
-        </p:txBody>
-      </p:sp>
-    </p:spTree>
-  </p:cSld>
-  <p:clrMapOvr>
-    <a:masterClrMapping/>
-  </p:clrMapOvr>
-</p:sld>
-</file>
-
-<file path=ppt/slides/slide9.xml><?xml version="1.0" encoding="utf-8"?>
-<p:sld xmlns:a="http://schemas.openxmlformats.org/drawingml/2006/main" xmlns:p="http://schemas.openxmlformats.org/presentationml/2006/main" xmlns:r="http://schemas.openxmlformats.org/officeDocument/2006/relationships">
-  <p:cSld>
-    <p:spTree>
-      <p:nvGrpSpPr>
-        <p:cNvPr id="1" name=""/>
-        <p:cNvGrpSpPr/>
-        <p:nvPr/>
-      </p:nvGrpSpPr>
-      <p:grpSpPr/>
-      <p:sp>
-        <p:nvSpPr>
-          <p:cNvPr id="2" name="Rectangle 1"/>
-          <p:cNvSpPr/>
-          <p:nvPr/>
-        </p:nvSpPr>
-        <p:spPr>
-          <a:xfrm>
-            <a:off x="0" y="0"/>
-            <a:ext cx="12191695" cy="1097280"/>
-          </a:xfrm>
-          <a:prstGeom prst="rect">
-            <a:avLst/>
-          </a:prstGeom>
-          <a:solidFill>
-            <a:srgbClr val="1E3A5F"/>
-          </a:solidFill>
-          <a:ln>
-            <a:solidFill>
-              <a:srgbClr val="1E3A5F"/>
-            </a:solidFill>
-          </a:ln>
-        </p:spPr>
-        <p:style>
-          <a:lnRef idx="1">
-            <a:schemeClr val="accent1"/>
-          </a:lnRef>
-          <a:fillRef idx="3">
-            <a:schemeClr val="accent1"/>
-          </a:fillRef>
-          <a:effectRef idx="2">
-            <a:schemeClr val="accent1"/>
-          </a:effectRef>
-          <a:fontRef idx="minor">
-            <a:schemeClr val="lt1"/>
-          </a:fontRef>
-        </p:style>
-        <p:txBody>
-          <a:bodyPr rtlCol="0" anchor="ctr"/>
-          <a:lstStyle/>
-          <a:p>
-            <a:pPr algn="ctr"/>
-          </a:p>
-        </p:txBody>
-      </p:sp>
-      <p:sp>
-        <p:nvSpPr>
-          <p:cNvPr id="3" name="Rectangle 2"/>
-          <p:cNvSpPr/>
-          <p:nvPr/>
-        </p:nvSpPr>
-        <p:spPr>
-          <a:xfrm>
-            <a:off x="0" y="1097280"/>
-            <a:ext cx="12191695" cy="91440"/>
-          </a:xfrm>
-          <a:prstGeom prst="rect">
-            <a:avLst/>
-          </a:prstGeom>
-          <a:solidFill>
-            <a:srgbClr val="3B82F6"/>
-          </a:solidFill>
-          <a:ln>
-            <a:solidFill>
-              <a:srgbClr val="3B82F6"/>
-            </a:solidFill>
-          </a:ln>
-        </p:spPr>
-        <p:style>
-          <a:lnRef idx="1">
-            <a:schemeClr val="accent1"/>
-          </a:lnRef>
-          <a:fillRef idx="3">
-            <a:schemeClr val="accent1"/>
-          </a:fillRef>
-          <a:effectRef idx="2">
-            <a:schemeClr val="accent1"/>
-          </a:effectRef>
-          <a:fontRef idx="minor">
-            <a:schemeClr val="lt1"/>
-          </a:fontRef>
-        </p:style>
-        <p:txBody>
-          <a:bodyPr rtlCol="0" anchor="ctr"/>
-          <a:lstStyle/>
-          <a:p>
-            <a:pPr algn="ctr"/>
-          </a:p>
-        </p:txBody>
-      </p:sp>
-      <p:sp>
-        <p:nvSpPr>
-          <p:cNvPr id="4" name="TextBox 3"/>
-          <p:cNvSpPr txBox="1"/>
-          <p:nvPr/>
-        </p:nvSpPr>
-        <p:spPr>
-          <a:xfrm>
-            <a:off x="457200" y="91440"/>
-            <a:ext cx="11277295" cy="914400"/>
-          </a:xfrm>
-          <a:prstGeom prst="rect">
-            <a:avLst/>
-          </a:prstGeom>
-          <a:noFill/>
-        </p:spPr>
-        <p:txBody>
-          <a:bodyPr wrap="none">
-            <a:spAutoFit/>
-          </a:bodyPr>
-          <a:lstStyle/>
-          <a:p>
-            <a:pPr>
-              <a:defRPr b="1" sz="3600">
-                <a:solidFill>
-                  <a:srgbClr val="FFFFFF"/>
-                </a:solidFill>
-              </a:defRPr>
-            </a:pPr>
-            <a:r>
-              <a:t>Factores Críticos de Éxito</a:t>
-            </a:r>
-          </a:p>
-        </p:txBody>
-      </p:sp>
-      <p:sp>
-        <p:nvSpPr>
-          <p:cNvPr id="5" name="TextBox 4"/>
-          <p:cNvSpPr txBox="1"/>
-          <p:nvPr/>
-        </p:nvSpPr>
-        <p:spPr>
-          <a:xfrm>
-            <a:off x="457200" y="1645920"/>
-            <a:ext cx="11277295" cy="5029200"/>
-          </a:xfrm>
-          <a:prstGeom prst="rect">
-            <a:avLst/>
-          </a:prstGeom>
-          <a:noFill/>
-        </p:spPr>
-        <p:txBody>
-          <a:bodyPr wrap="square">
-            <a:spAutoFit/>
-          </a:bodyPr>
-          <a:lstStyle/>
-          <a:p>
-            <a:pPr>
-              <a:defRPr sz="2200">
-                <a:solidFill>
-                  <a:srgbClr val="323232"/>
-                </a:solidFill>
-              </a:defRPr>
-            </a:pPr>
-            <a:r>
-              <a:t>QA y SecOps tempranos.</a:t>
-            </a:r>
-          </a:p>
-          <a:p>
-            <a:pPr>
-              <a:spcBef>
-                <a:spcPts val="1400"/>
-              </a:spcBef>
-              <a:defRPr sz="2200">
-                <a:solidFill>
-                  <a:srgbClr val="323232"/>
-                </a:solidFill>
-              </a:defRPr>
-            </a:pPr>
-            <a:r>
-              <a:t>• ADRs evitan discusiones.</a:t>
-            </a:r>
-          </a:p>
-          <a:p>
-            <a:pPr>
-              <a:spcBef>
-                <a:spcPts val="1400"/>
-              </a:spcBef>
-              <a:defRPr sz="2200">
-                <a:solidFill>
-                  <a:srgbClr val="323232"/>
-                </a:solidFill>
-              </a:defRPr>
-            </a:pPr>
-            <a:r>
-              <a:t>• Automatización no-negociable.</a:t>
+              </a:rPr>
+              <a:t>100% Trazabilidad Lograda</a:t>
             </a:r>
           </a:p>
         </p:txBody>
